--- a/examples/pm5_chapter_cover_insertion/chapter_cover_insertion_merged.pptx
+++ b/examples/pm5_chapter_cover_insertion/chapter_cover_insertion_merged.pptx
@@ -814,7 +814,7 @@
     </p:spTree>
     <p:extLst>
       <p:ext uri="{BB962C8B-B14F-4D97-AF65-F5344CB8AC3E}">
-        <p14:creationId xmlns:p14="http://schemas.microsoft.com/office/powerpoint/2010/main" val="2641926018"/>
+        <p14:creationId xmlns:p14="http://schemas.microsoft.com/office/powerpoint/2010/main" val="3818530957"/>
       </p:ext>
     </p:extLst>
   </p:cSld>
@@ -898,7 +898,7 @@
     </p:spTree>
     <p:extLst>
       <p:ext uri="{BB962C8B-B14F-4D97-AF65-F5344CB8AC3E}">
-        <p14:creationId xmlns:p14="http://schemas.microsoft.com/office/powerpoint/2010/main" val="464916550"/>
+        <p14:creationId xmlns:p14="http://schemas.microsoft.com/office/powerpoint/2010/main" val="1822818296"/>
       </p:ext>
     </p:extLst>
   </p:cSld>
@@ -1006,7 +1006,7 @@
     </p:spTree>
     <p:extLst>
       <p:ext uri="{BB962C8B-B14F-4D97-AF65-F5344CB8AC3E}">
-        <p14:creationId xmlns:p14="http://schemas.microsoft.com/office/powerpoint/2010/main" val="441214609"/>
+        <p14:creationId xmlns:p14="http://schemas.microsoft.com/office/powerpoint/2010/main" val="724972566"/>
       </p:ext>
     </p:extLst>
   </p:cSld>
@@ -1114,7 +1114,7 @@
     </p:spTree>
     <p:extLst>
       <p:ext uri="{BB962C8B-B14F-4D97-AF65-F5344CB8AC3E}">
-        <p14:creationId xmlns:p14="http://schemas.microsoft.com/office/powerpoint/2010/main" val="1807343545"/>
+        <p14:creationId xmlns:p14="http://schemas.microsoft.com/office/powerpoint/2010/main" val="3410650122"/>
       </p:ext>
     </p:extLst>
   </p:cSld>
@@ -1356,7 +1356,7 @@
     </p:spTree>
     <p:extLst>
       <p:ext uri="{BB962C8B-B14F-4D97-AF65-F5344CB8AC3E}">
-        <p14:creationId xmlns:p14="http://schemas.microsoft.com/office/powerpoint/2010/main" val="3831919161"/>
+        <p14:creationId xmlns:p14="http://schemas.microsoft.com/office/powerpoint/2010/main" val="215908299"/>
       </p:ext>
     </p:extLst>
   </p:cSld>
@@ -1598,7 +1598,7 @@
     </p:spTree>
     <p:extLst>
       <p:ext uri="{BB962C8B-B14F-4D97-AF65-F5344CB8AC3E}">
-        <p14:creationId xmlns:p14="http://schemas.microsoft.com/office/powerpoint/2010/main" val="2093203329"/>
+        <p14:creationId xmlns:p14="http://schemas.microsoft.com/office/powerpoint/2010/main" val="614752326"/>
       </p:ext>
     </p:extLst>
   </p:cSld>
@@ -1840,7 +1840,7 @@
     </p:spTree>
     <p:extLst>
       <p:ext uri="{BB962C8B-B14F-4D97-AF65-F5344CB8AC3E}">
-        <p14:creationId xmlns:p14="http://schemas.microsoft.com/office/powerpoint/2010/main" val="2584189342"/>
+        <p14:creationId xmlns:p14="http://schemas.microsoft.com/office/powerpoint/2010/main" val="3762118167"/>
       </p:ext>
     </p:extLst>
   </p:cSld>
@@ -2090,7 +2090,7 @@
     </p:spTree>
     <p:extLst>
       <p:ext uri="{BB962C8B-B14F-4D97-AF65-F5344CB8AC3E}">
-        <p14:creationId xmlns:p14="http://schemas.microsoft.com/office/powerpoint/2010/main" val="2420233061"/>
+        <p14:creationId xmlns:p14="http://schemas.microsoft.com/office/powerpoint/2010/main" val="2205164979"/>
       </p:ext>
     </p:extLst>
   </p:cSld>
@@ -2332,7 +2332,7 @@
     </p:spTree>
     <p:extLst>
       <p:ext uri="{BB962C8B-B14F-4D97-AF65-F5344CB8AC3E}">
-        <p14:creationId xmlns:p14="http://schemas.microsoft.com/office/powerpoint/2010/main" val="3069157743"/>
+        <p14:creationId xmlns:p14="http://schemas.microsoft.com/office/powerpoint/2010/main" val="4107905084"/>
       </p:ext>
     </p:extLst>
   </p:cSld>
@@ -2416,7 +2416,7 @@
     </p:spTree>
     <p:extLst>
       <p:ext uri="{BB962C8B-B14F-4D97-AF65-F5344CB8AC3E}">
-        <p14:creationId xmlns:p14="http://schemas.microsoft.com/office/powerpoint/2010/main" val="4010460676"/>
+        <p14:creationId xmlns:p14="http://schemas.microsoft.com/office/powerpoint/2010/main" val="436163235"/>
       </p:ext>
     </p:extLst>
   </p:cSld>
@@ -2524,7 +2524,7 @@
     </p:spTree>
     <p:extLst>
       <p:ext uri="{BB962C8B-B14F-4D97-AF65-F5344CB8AC3E}">
-        <p14:creationId xmlns:p14="http://schemas.microsoft.com/office/powerpoint/2010/main" val="1635615692"/>
+        <p14:creationId xmlns:p14="http://schemas.microsoft.com/office/powerpoint/2010/main" val="2819194813"/>
       </p:ext>
     </p:extLst>
   </p:cSld>
@@ -2632,7 +2632,7 @@
     </p:spTree>
     <p:extLst>
       <p:ext uri="{BB962C8B-B14F-4D97-AF65-F5344CB8AC3E}">
-        <p14:creationId xmlns:p14="http://schemas.microsoft.com/office/powerpoint/2010/main" val="1974072116"/>
+        <p14:creationId xmlns:p14="http://schemas.microsoft.com/office/powerpoint/2010/main" val="2302289311"/>
       </p:ext>
     </p:extLst>
   </p:cSld>
@@ -6719,7 +6719,7 @@
     </p:spTree>
     <p:extLst>
       <p:ext uri="{BB962C8B-B14F-4D97-AF65-F5344CB8AC3E}">
-        <p14:creationId xmlns:p14="http://schemas.microsoft.com/office/powerpoint/2010/main" val="3539948534"/>
+        <p14:creationId xmlns:p14="http://schemas.microsoft.com/office/powerpoint/2010/main" val="115315384"/>
       </p:ext>
     </p:extLst>
   </p:cSld>
@@ -6847,7 +6847,7 @@
     </p:spTree>
     <p:extLst>
       <p:ext uri="{BB962C8B-B14F-4D97-AF65-F5344CB8AC3E}">
-        <p14:creationId xmlns:p14="http://schemas.microsoft.com/office/powerpoint/2010/main" val="1788752587"/>
+        <p14:creationId xmlns:p14="http://schemas.microsoft.com/office/powerpoint/2010/main" val="3298050838"/>
       </p:ext>
     </p:extLst>
   </p:cSld>
@@ -7363,7 +7363,7 @@
     </p:spTree>
     <p:extLst>
       <p:ext uri="{BB962C8B-B14F-4D97-AF65-F5344CB8AC3E}">
-        <p14:creationId xmlns:p14="http://schemas.microsoft.com/office/powerpoint/2010/main" val="2852904019"/>
+        <p14:creationId xmlns:p14="http://schemas.microsoft.com/office/powerpoint/2010/main" val="2888268718"/>
       </p:ext>
     </p:extLst>
   </p:cSld>
@@ -7925,7 +7925,7 @@
     </p:spTree>
     <p:extLst>
       <p:ext uri="{BB962C8B-B14F-4D97-AF65-F5344CB8AC3E}">
-        <p14:creationId xmlns:p14="http://schemas.microsoft.com/office/powerpoint/2010/main" val="2239051466"/>
+        <p14:creationId xmlns:p14="http://schemas.microsoft.com/office/powerpoint/2010/main" val="276242021"/>
       </p:ext>
     </p:extLst>
   </p:cSld>
@@ -10307,7 +10307,7 @@
     </p:spTree>
     <p:extLst>
       <p:ext uri="{BB962C8B-B14F-4D97-AF65-F5344CB8AC3E}">
-        <p14:creationId xmlns:p14="http://schemas.microsoft.com/office/powerpoint/2010/main" val="3260139573"/>
+        <p14:creationId xmlns:p14="http://schemas.microsoft.com/office/powerpoint/2010/main" val="2638406560"/>
       </p:ext>
     </p:extLst>
   </p:cSld>
@@ -12608,7 +12608,7 @@
     </p:spTree>
     <p:extLst>
       <p:ext uri="{BB962C8B-B14F-4D97-AF65-F5344CB8AC3E}">
-        <p14:creationId xmlns:p14="http://schemas.microsoft.com/office/powerpoint/2010/main" val="3100928930"/>
+        <p14:creationId xmlns:p14="http://schemas.microsoft.com/office/powerpoint/2010/main" val="2009074597"/>
       </p:ext>
     </p:extLst>
   </p:cSld>
@@ -14749,7 +14749,7 @@
     </p:spTree>
     <p:extLst>
       <p:ext uri="{BB962C8B-B14F-4D97-AF65-F5344CB8AC3E}">
-        <p14:creationId xmlns:p14="http://schemas.microsoft.com/office/powerpoint/2010/main" val="4094585609"/>
+        <p14:creationId xmlns:p14="http://schemas.microsoft.com/office/powerpoint/2010/main" val="1295131876"/>
       </p:ext>
     </p:extLst>
   </p:cSld>
@@ -15707,7 +15707,7 @@
     </p:spTree>
     <p:extLst>
       <p:ext uri="{BB962C8B-B14F-4D97-AF65-F5344CB8AC3E}">
-        <p14:creationId xmlns:p14="http://schemas.microsoft.com/office/powerpoint/2010/main" val="352303858"/>
+        <p14:creationId xmlns:p14="http://schemas.microsoft.com/office/powerpoint/2010/main" val="3606694884"/>
       </p:ext>
     </p:extLst>
   </p:cSld>
@@ -17851,7 +17851,7 @@
     </p:spTree>
     <p:extLst>
       <p:ext uri="{BB962C8B-B14F-4D97-AF65-F5344CB8AC3E}">
-        <p14:creationId xmlns:p14="http://schemas.microsoft.com/office/powerpoint/2010/main" val="10055311"/>
+        <p14:creationId xmlns:p14="http://schemas.microsoft.com/office/powerpoint/2010/main" val="4249598359"/>
       </p:ext>
     </p:extLst>
   </p:cSld>
@@ -18065,7 +18065,7 @@
     </p:spTree>
     <p:extLst>
       <p:ext uri="{BB962C8B-B14F-4D97-AF65-F5344CB8AC3E}">
-        <p14:creationId xmlns:p14="http://schemas.microsoft.com/office/powerpoint/2010/main" val="3799481420"/>
+        <p14:creationId xmlns:p14="http://schemas.microsoft.com/office/powerpoint/2010/main" val="3337438364"/>
       </p:ext>
     </p:extLst>
   </p:cSld>
@@ -18581,7 +18581,7 @@
     </p:spTree>
     <p:extLst>
       <p:ext uri="{BB962C8B-B14F-4D97-AF65-F5344CB8AC3E}">
-        <p14:creationId xmlns:p14="http://schemas.microsoft.com/office/powerpoint/2010/main" val="2473505896"/>
+        <p14:creationId xmlns:p14="http://schemas.microsoft.com/office/powerpoint/2010/main" val="2811985823"/>
       </p:ext>
     </p:extLst>
   </p:cSld>
@@ -19143,7 +19143,7 @@
     </p:spTree>
     <p:extLst>
       <p:ext uri="{BB962C8B-B14F-4D97-AF65-F5344CB8AC3E}">
-        <p14:creationId xmlns:p14="http://schemas.microsoft.com/office/powerpoint/2010/main" val="87634310"/>
+        <p14:creationId xmlns:p14="http://schemas.microsoft.com/office/powerpoint/2010/main" val="2016627449"/>
       </p:ext>
     </p:extLst>
   </p:cSld>

--- a/examples/pm5_chapter_cover_insertion/chapter_cover_insertion_merged.pptx
+++ b/examples/pm5_chapter_cover_insertion/chapter_cover_insertion_merged.pptx
@@ -249,7 +249,7 @@
           <a:p>
             <a:fld id="{294670BC-B8C6-44A7-84E1-23632D8FD86F}" type="datetimeFigureOut">
               <a:rPr kumimoji="1" lang="ja-JP" altLang="en-US" smtClean="0"/>
-              <a:t>2026/6/4</a:t>
+              <a:t>2026/6/6</a:t>
             </a:fld>
             <a:endParaRPr kumimoji="1" lang="ja-JP" altLang="en-US"/>
           </a:p>
@@ -814,7 +814,7 @@
     </p:spTree>
     <p:extLst>
       <p:ext uri="{BB962C8B-B14F-4D97-AF65-F5344CB8AC3E}">
-        <p14:creationId xmlns:p14="http://schemas.microsoft.com/office/powerpoint/2010/main" val="3818530957"/>
+        <p14:creationId xmlns:p14="http://schemas.microsoft.com/office/powerpoint/2010/main" val="3465606441"/>
       </p:ext>
     </p:extLst>
   </p:cSld>
@@ -898,7 +898,7 @@
     </p:spTree>
     <p:extLst>
       <p:ext uri="{BB962C8B-B14F-4D97-AF65-F5344CB8AC3E}">
-        <p14:creationId xmlns:p14="http://schemas.microsoft.com/office/powerpoint/2010/main" val="1822818296"/>
+        <p14:creationId xmlns:p14="http://schemas.microsoft.com/office/powerpoint/2010/main" val="1404418702"/>
       </p:ext>
     </p:extLst>
   </p:cSld>
@@ -1006,7 +1006,7 @@
     </p:spTree>
     <p:extLst>
       <p:ext uri="{BB962C8B-B14F-4D97-AF65-F5344CB8AC3E}">
-        <p14:creationId xmlns:p14="http://schemas.microsoft.com/office/powerpoint/2010/main" val="724972566"/>
+        <p14:creationId xmlns:p14="http://schemas.microsoft.com/office/powerpoint/2010/main" val="4068162004"/>
       </p:ext>
     </p:extLst>
   </p:cSld>
@@ -1114,7 +1114,7 @@
     </p:spTree>
     <p:extLst>
       <p:ext uri="{BB962C8B-B14F-4D97-AF65-F5344CB8AC3E}">
-        <p14:creationId xmlns:p14="http://schemas.microsoft.com/office/powerpoint/2010/main" val="3410650122"/>
+        <p14:creationId xmlns:p14="http://schemas.microsoft.com/office/powerpoint/2010/main" val="897330219"/>
       </p:ext>
     </p:extLst>
   </p:cSld>
@@ -1356,7 +1356,7 @@
     </p:spTree>
     <p:extLst>
       <p:ext uri="{BB962C8B-B14F-4D97-AF65-F5344CB8AC3E}">
-        <p14:creationId xmlns:p14="http://schemas.microsoft.com/office/powerpoint/2010/main" val="215908299"/>
+        <p14:creationId xmlns:p14="http://schemas.microsoft.com/office/powerpoint/2010/main" val="3832630527"/>
       </p:ext>
     </p:extLst>
   </p:cSld>
@@ -1598,7 +1598,7 @@
     </p:spTree>
     <p:extLst>
       <p:ext uri="{BB962C8B-B14F-4D97-AF65-F5344CB8AC3E}">
-        <p14:creationId xmlns:p14="http://schemas.microsoft.com/office/powerpoint/2010/main" val="614752326"/>
+        <p14:creationId xmlns:p14="http://schemas.microsoft.com/office/powerpoint/2010/main" val="945312240"/>
       </p:ext>
     </p:extLst>
   </p:cSld>
@@ -1840,7 +1840,7 @@
     </p:spTree>
     <p:extLst>
       <p:ext uri="{BB962C8B-B14F-4D97-AF65-F5344CB8AC3E}">
-        <p14:creationId xmlns:p14="http://schemas.microsoft.com/office/powerpoint/2010/main" val="3762118167"/>
+        <p14:creationId xmlns:p14="http://schemas.microsoft.com/office/powerpoint/2010/main" val="1373935678"/>
       </p:ext>
     </p:extLst>
   </p:cSld>
@@ -2090,7 +2090,7 @@
     </p:spTree>
     <p:extLst>
       <p:ext uri="{BB962C8B-B14F-4D97-AF65-F5344CB8AC3E}">
-        <p14:creationId xmlns:p14="http://schemas.microsoft.com/office/powerpoint/2010/main" val="2205164979"/>
+        <p14:creationId xmlns:p14="http://schemas.microsoft.com/office/powerpoint/2010/main" val="3731193838"/>
       </p:ext>
     </p:extLst>
   </p:cSld>
@@ -2332,7 +2332,7 @@
     </p:spTree>
     <p:extLst>
       <p:ext uri="{BB962C8B-B14F-4D97-AF65-F5344CB8AC3E}">
-        <p14:creationId xmlns:p14="http://schemas.microsoft.com/office/powerpoint/2010/main" val="4107905084"/>
+        <p14:creationId xmlns:p14="http://schemas.microsoft.com/office/powerpoint/2010/main" val="2456402957"/>
       </p:ext>
     </p:extLst>
   </p:cSld>
@@ -2416,7 +2416,7 @@
     </p:spTree>
     <p:extLst>
       <p:ext uri="{BB962C8B-B14F-4D97-AF65-F5344CB8AC3E}">
-        <p14:creationId xmlns:p14="http://schemas.microsoft.com/office/powerpoint/2010/main" val="436163235"/>
+        <p14:creationId xmlns:p14="http://schemas.microsoft.com/office/powerpoint/2010/main" val="3004169344"/>
       </p:ext>
     </p:extLst>
   </p:cSld>
@@ -2524,7 +2524,7 @@
     </p:spTree>
     <p:extLst>
       <p:ext uri="{BB962C8B-B14F-4D97-AF65-F5344CB8AC3E}">
-        <p14:creationId xmlns:p14="http://schemas.microsoft.com/office/powerpoint/2010/main" val="2819194813"/>
+        <p14:creationId xmlns:p14="http://schemas.microsoft.com/office/powerpoint/2010/main" val="154736469"/>
       </p:ext>
     </p:extLst>
   </p:cSld>
@@ -2632,7 +2632,7 @@
     </p:spTree>
     <p:extLst>
       <p:ext uri="{BB962C8B-B14F-4D97-AF65-F5344CB8AC3E}">
-        <p14:creationId xmlns:p14="http://schemas.microsoft.com/office/powerpoint/2010/main" val="2302289311"/>
+        <p14:creationId xmlns:p14="http://schemas.microsoft.com/office/powerpoint/2010/main" val="2590749181"/>
       </p:ext>
     </p:extLst>
   </p:cSld>
@@ -6719,7 +6719,7 @@
     </p:spTree>
     <p:extLst>
       <p:ext uri="{BB962C8B-B14F-4D97-AF65-F5344CB8AC3E}">
-        <p14:creationId xmlns:p14="http://schemas.microsoft.com/office/powerpoint/2010/main" val="115315384"/>
+        <p14:creationId xmlns:p14="http://schemas.microsoft.com/office/powerpoint/2010/main" val="3721160759"/>
       </p:ext>
     </p:extLst>
   </p:cSld>
@@ -6847,7 +6847,7 @@
     </p:spTree>
     <p:extLst>
       <p:ext uri="{BB962C8B-B14F-4D97-AF65-F5344CB8AC3E}">
-        <p14:creationId xmlns:p14="http://schemas.microsoft.com/office/powerpoint/2010/main" val="3298050838"/>
+        <p14:creationId xmlns:p14="http://schemas.microsoft.com/office/powerpoint/2010/main" val="583352616"/>
       </p:ext>
     </p:extLst>
   </p:cSld>
@@ -7363,7 +7363,7 @@
     </p:spTree>
     <p:extLst>
       <p:ext uri="{BB962C8B-B14F-4D97-AF65-F5344CB8AC3E}">
-        <p14:creationId xmlns:p14="http://schemas.microsoft.com/office/powerpoint/2010/main" val="2888268718"/>
+        <p14:creationId xmlns:p14="http://schemas.microsoft.com/office/powerpoint/2010/main" val="1866608236"/>
       </p:ext>
     </p:extLst>
   </p:cSld>
@@ -7925,7 +7925,7 @@
     </p:spTree>
     <p:extLst>
       <p:ext uri="{BB962C8B-B14F-4D97-AF65-F5344CB8AC3E}">
-        <p14:creationId xmlns:p14="http://schemas.microsoft.com/office/powerpoint/2010/main" val="276242021"/>
+        <p14:creationId xmlns:p14="http://schemas.microsoft.com/office/powerpoint/2010/main" val="90126971"/>
       </p:ext>
     </p:extLst>
   </p:cSld>
@@ -10307,7 +10307,7 @@
     </p:spTree>
     <p:extLst>
       <p:ext uri="{BB962C8B-B14F-4D97-AF65-F5344CB8AC3E}">
-        <p14:creationId xmlns:p14="http://schemas.microsoft.com/office/powerpoint/2010/main" val="2638406560"/>
+        <p14:creationId xmlns:p14="http://schemas.microsoft.com/office/powerpoint/2010/main" val="3324540402"/>
       </p:ext>
     </p:extLst>
   </p:cSld>
@@ -12608,7 +12608,7 @@
     </p:spTree>
     <p:extLst>
       <p:ext uri="{BB962C8B-B14F-4D97-AF65-F5344CB8AC3E}">
-        <p14:creationId xmlns:p14="http://schemas.microsoft.com/office/powerpoint/2010/main" val="2009074597"/>
+        <p14:creationId xmlns:p14="http://schemas.microsoft.com/office/powerpoint/2010/main" val="788740927"/>
       </p:ext>
     </p:extLst>
   </p:cSld>
@@ -14749,7 +14749,7 @@
     </p:spTree>
     <p:extLst>
       <p:ext uri="{BB962C8B-B14F-4D97-AF65-F5344CB8AC3E}">
-        <p14:creationId xmlns:p14="http://schemas.microsoft.com/office/powerpoint/2010/main" val="1295131876"/>
+        <p14:creationId xmlns:p14="http://schemas.microsoft.com/office/powerpoint/2010/main" val="3121881173"/>
       </p:ext>
     </p:extLst>
   </p:cSld>
@@ -15707,7 +15707,7 @@
     </p:spTree>
     <p:extLst>
       <p:ext uri="{BB962C8B-B14F-4D97-AF65-F5344CB8AC3E}">
-        <p14:creationId xmlns:p14="http://schemas.microsoft.com/office/powerpoint/2010/main" val="3606694884"/>
+        <p14:creationId xmlns:p14="http://schemas.microsoft.com/office/powerpoint/2010/main" val="1443935178"/>
       </p:ext>
     </p:extLst>
   </p:cSld>
@@ -17851,7 +17851,7 @@
     </p:spTree>
     <p:extLst>
       <p:ext uri="{BB962C8B-B14F-4D97-AF65-F5344CB8AC3E}">
-        <p14:creationId xmlns:p14="http://schemas.microsoft.com/office/powerpoint/2010/main" val="4249598359"/>
+        <p14:creationId xmlns:p14="http://schemas.microsoft.com/office/powerpoint/2010/main" val="2628036635"/>
       </p:ext>
     </p:extLst>
   </p:cSld>
@@ -18065,7 +18065,7 @@
     </p:spTree>
     <p:extLst>
       <p:ext uri="{BB962C8B-B14F-4D97-AF65-F5344CB8AC3E}">
-        <p14:creationId xmlns:p14="http://schemas.microsoft.com/office/powerpoint/2010/main" val="3337438364"/>
+        <p14:creationId xmlns:p14="http://schemas.microsoft.com/office/powerpoint/2010/main" val="3391702655"/>
       </p:ext>
     </p:extLst>
   </p:cSld>
@@ -18581,7 +18581,7 @@
     </p:spTree>
     <p:extLst>
       <p:ext uri="{BB962C8B-B14F-4D97-AF65-F5344CB8AC3E}">
-        <p14:creationId xmlns:p14="http://schemas.microsoft.com/office/powerpoint/2010/main" val="2811985823"/>
+        <p14:creationId xmlns:p14="http://schemas.microsoft.com/office/powerpoint/2010/main" val="2885733496"/>
       </p:ext>
     </p:extLst>
   </p:cSld>
@@ -19143,7 +19143,7 @@
     </p:spTree>
     <p:extLst>
       <p:ext uri="{BB962C8B-B14F-4D97-AF65-F5344CB8AC3E}">
-        <p14:creationId xmlns:p14="http://schemas.microsoft.com/office/powerpoint/2010/main" val="2016627449"/>
+        <p14:creationId xmlns:p14="http://schemas.microsoft.com/office/powerpoint/2010/main" val="175398266"/>
       </p:ext>
     </p:extLst>
   </p:cSld>
